--- a/tests/e2e/fixtures/sample-multislide.pptx
+++ b/tests/e2e/fixtures/sample-multislide.pptx
@@ -13,7 +13,19 @@
 <p:sld xmlns:a="http://schemas.openxmlformats.org/drawingml/2006/main" xmlns:r="http://schemas.openxmlformats.org/officeDocument/2006/relationships" xmlns:p="http://schemas.openxmlformats.org/presentationml/2006/main">
   <p:cSld>
     <p:spTree>
+      <p:nvGrpSpPr>
+        <p:cNvPr id="1" name=""/>
+        <p:cNvGrpSpPr/>
+        <p:nvPr/>
+      </p:nvGrpSpPr>
+      <p:grpSpPr/>
       <p:sp>
+        <p:nvSpPr>
+          <p:cNvPr id="2" name="TextBox 2"/>
+          <p:cNvSpPr txBox="1"/>
+          <p:nvPr/>
+        </p:nvSpPr>
+        <p:spPr/>
         <p:txBody>
           <a:bodyPr/>
           <a:lstStyle/>
@@ -33,7 +45,19 @@
 <p:sld xmlns:a="http://schemas.openxmlformats.org/drawingml/2006/main" xmlns:r="http://schemas.openxmlformats.org/officeDocument/2006/relationships" xmlns:p="http://schemas.openxmlformats.org/presentationml/2006/main">
   <p:cSld>
     <p:spTree>
+      <p:nvGrpSpPr>
+        <p:cNvPr id="1" name=""/>
+        <p:cNvGrpSpPr/>
+        <p:nvPr/>
+      </p:nvGrpSpPr>
+      <p:grpSpPr/>
       <p:sp>
+        <p:nvSpPr>
+          <p:cNvPr id="2" name="TextBox 2"/>
+          <p:cNvSpPr txBox="1"/>
+          <p:nvPr/>
+        </p:nvSpPr>
+        <p:spPr/>
         <p:txBody>
           <a:bodyPr/>
           <a:lstStyle/>
